--- a/Diabetic_Retinopathy_Presentation.pptx
+++ b/Diabetic_Retinopathy_Presentation.pptx
@@ -6042,7 +6042,25 @@
         </p:spPr>
         <p:txBody>
           <a:bodyPr/>
-          <a:p/>
+          <a:p>
+            <a:br/>
+            <a:pPr>
+              <a:defRPr sz="1800"/>
+            </a:pPr>
+            <a:r>
+              <a:t>• ΔQWK = +0.0062 (p = 0.264).</a:t>
+            </a:r>
+            <a:br/>
+            <a:br/>
+            <a:r>
+              <a:t>• Difference is not statistically significant.</a:t>
+            </a:r>
+            <a:br/>
+            <a:br/>
+            <a:r>
+              <a:t>• Severe-error reduction (5.6% → 3.8%) represents a favourable trend.</a:t>
+            </a:r>
+          </a:p>
         </p:txBody>
       </p:sp>
       <p:sp>
@@ -6136,7 +6154,25 @@
         </p:spPr>
         <p:txBody>
           <a:bodyPr/>
-          <a:p/>
+          <a:p>
+            <a:br/>
+            <a:pPr>
+              <a:defRPr sz="1800"/>
+            </a:pPr>
+            <a:r>
+              <a:t>• Significant underperformance.</a:t>
+            </a:r>
+            <a:br/>
+            <a:br/>
+            <a:r>
+              <a:t>• Minority-class collapse occurred.</a:t>
+            </a:r>
+            <a:br/>
+            <a:br/>
+            <a:r>
+              <a:t>• Indicates CORAL requires inverse-frequency weighting for this dataset.</a:t>
+            </a:r>
+          </a:p>
         </p:txBody>
       </p:sp>
       <p:sp>
@@ -6206,42 +6242,6 @@
       </p:sp>
       <p:sp>
         <p:nvSpPr>
-          <p:cNvPr id="11" name="Text 9"/>
-          <p:cNvSpPr txBox="1"/>
-          <p:nvPr/>
-        </p:nvSpPr>
-        <p:spPr>
-          <a:xfrm>
-            <a:off x="457200" y="3520440"/>
-            <a:ext cx="8229600" cy="1005840"/>
-          </a:xfrm>
-          <a:prstGeom prst="rect">
-            <a:avLst/>
-          </a:prstGeom>
-          <a:noFill/>
-          <a:ln/>
-        </p:spPr>
-        <p:txBody>
-          <a:bodyPr wrap="square" lIns="0" tIns="0" rIns="0" bIns="0" rtlCol="0" anchor="t"/>
-          <a:lstStyle/>
-          <a:p>
-            <a:pPr indent="0" marL="0">
-              <a:buNone/>
-            </a:pPr>
-            <a:r>
-              <a:rPr lang="en-US" sz="1300" b="1" dirty="0">
-                <a:solidFill>
-                  <a:srgbClr val="0F172A"/>
-                </a:solidFill>
-              </a:rPr>
-              <a:t>The severe-error reduction (31 → 21 patients) is descriptive. No test confirms it, so present it as a favourable trend on one split, not a proven effect. CORAL likely needs inverse-frequency weighting.</a:t>
-            </a:r>
-            <a:endParaRPr lang="en-US" sz="1300" dirty="0"/>
-          </a:p>
-        </p:txBody>
-      </p:sp>
-      <p:sp>
-        <p:nvSpPr>
           <p:cNvPr id="25" name="Slide Number Placeholder 0"/>
           <p:cNvSpPr>
             <a:spLocks noGrp="1"/>
@@ -6293,7 +6293,7 @@
         </p:nvSpPr>
         <p:spPr>
           <a:xfrm>
-            <a:off x="457200" y="3931920"/>
+            <a:off x="457200" y="3520440"/>
             <a:ext cx="8229600" cy="1005840"/>
           </a:xfrm>
           <a:prstGeom prst="rect">
@@ -6306,39 +6306,36 @@
             <a:spAutoFit/>
           </a:bodyPr>
           <a:lstStyle/>
-          <a:p/>
           <a:p>
             <a:pPr>
-              <a:defRPr b="1" sz="1400">
-                <a:solidFill>
-                  <a:srgbClr val="7DD3FC"/>
-                </a:solidFill>
-              </a:defRPr>
-            </a:pPr>
-            <a:r>
-              <a:rPr>
-                <a:solidFill>
-                  <a:srgbClr val="0F172A"/>
-                </a:solidFill>
-              </a:rPr>
+              <a:defRPr sz="2000"/>
+            </a:pPr>
+            <a:r>
               <a:t>Variant D (CORN) vs. Variant B (CORAL):</a:t>
             </a:r>
           </a:p>
           <a:p>
             <a:pPr>
-              <a:defRPr sz="1200">
-                <a:solidFill>
-                  <a:srgbClr val="FFFFFF"/>
-                </a:solidFill>
-              </a:defRPr>
-            </a:pPr>
-            <a:r>
-              <a:rPr>
-                <a:solidFill>
-                  <a:srgbClr val="0F172A"/>
-                </a:solidFill>
-              </a:rPr>
-              <a:t>ΔQWK = +0.1212 (95% CI: [+0.0924, +0.1504], p &lt; 0.001). Wilcoxon signed-rank p = 9.35e-21. Statistically decisive improvement on minority classes.</a:t>
+              <a:defRPr sz="2000"/>
+            </a:pPr>
+            <a:r>
+              <a:t>• ΔQWK = +0.1212 (95% CI: [+0.0924, +0.1504], p &lt; 0.001).</a:t>
+            </a:r>
+          </a:p>
+          <a:p>
+            <a:pPr>
+              <a:defRPr sz="2000"/>
+            </a:pPr>
+            <a:r>
+              <a:t>• Wilcoxon signed-rank p = 9.35e-21.</a:t>
+            </a:r>
+          </a:p>
+          <a:p>
+            <a:pPr>
+              <a:defRPr sz="2000"/>
+            </a:pPr>
+            <a:r>
+              <a:t>• Statistically decisive improvement on minority classes.</a:t>
             </a:r>
           </a:p>
         </p:txBody>
